--- a/public/downloads/US-114050-L4-Business-Information-Needs.pptx
+++ b/public/downloads/US-114050-L4-Business-Information-Needs.pptx
@@ -2018,7 +2018,7 @@
                 <a:ea typeface="Aptos" pitchFamily="34" charset="-122"/>
                 <a:cs typeface="Aptos" pitchFamily="34" charset="-120"/>
               </a:rPr>
-              <a:t>US 114050 · LESSON 4 · NQF LEVEL 5</a:t>
+              <a:t>US 114050 � LESSON 4 � NQF LEVEL 5</a:t>
             </a:r>
             <a:endParaRPr lang="en-US" sz="1800" dirty="0"/>
           </a:p>
@@ -2099,7 +2099,7 @@
                 <a:ea typeface="Aptos" pitchFamily="34" charset="-122"/>
                 <a:cs typeface="Aptos" pitchFamily="34" charset="-120"/>
               </a:rPr>
-              <a:t>From data to wisdom — how a business gathers data, turns it into information, uses it in its roles, and protects it from threats</a:t>
+              <a:t>From data to wisdom � how a business gathers data, turns it into information, uses it in its roles, and protects it from threats</a:t>
             </a:r>
             <a:endParaRPr lang="en-US" sz="1900" dirty="0"/>
           </a:p>
@@ -2233,7 +2233,7 @@
                 <a:ea typeface="Aptos" pitchFamily="34" charset="-122"/>
                 <a:cs typeface="Aptos" pitchFamily="34" charset="-120"/>
               </a:rPr>
-              <a:t>90 minutes · Self &amp; Group</a:t>
+              <a:t>90 minutes � Self &amp; Group</a:t>
             </a:r>
             <a:endParaRPr lang="en-US" sz="1800" dirty="0"/>
           </a:p>
@@ -2314,7 +2314,7 @@
                 <a:ea typeface="Aptos" pitchFamily="34" charset="-122"/>
                 <a:cs typeface="Aptos" pitchFamily="34" charset="-120"/>
               </a:rPr>
-              <a:t>Thursday, 27 Aug 2026 · 09h00 – 14h00</a:t>
+              <a:t>Thursday, 27 Aug 2026 � 09h00 � 14h00</a:t>
             </a:r>
             <a:endParaRPr lang="en-US" sz="1800" dirty="0"/>
           </a:p>
@@ -2395,7 +2395,7 @@
                 <a:ea typeface="Aptos" pitchFamily="34" charset="-122"/>
                 <a:cs typeface="Aptos" pitchFamily="34" charset="-120"/>
               </a:rPr>
-              <a:t>Module 1 · Professional Team Development</a:t>
+              <a:t>Module 1 � Professional Team Development</a:t>
             </a:r>
             <a:endParaRPr lang="en-US" sz="1800" dirty="0"/>
           </a:p>
@@ -2515,7 +2515,7 @@
                 <a:ea typeface="Aptos" pitchFamily="34" charset="-122"/>
                 <a:cs typeface="Aptos" pitchFamily="34" charset="-120"/>
               </a:rPr>
-              <a:t>ITSS Learn · Investec · Corporate Banking Technology</a:t>
+              <a:t>ITSS Learn � Investec � Corporate Banking Technology</a:t>
             </a:r>
             <a:endParaRPr lang="en-US" sz="1800" dirty="0"/>
           </a:p>
@@ -2586,7 +2586,7 @@
                 <a:ea typeface="Aptos" pitchFamily="34" charset="-122"/>
                 <a:cs typeface="Aptos" pitchFamily="34" charset="-120"/>
               </a:rPr>
-              <a:t>US 114050 Â· Lesson 4 â€” The business and its information needs Â· NQF 5</a:t>
+              <a:t>US 114050 · Lesson 4 — The business and its information needs · NQF 5</a:t>
             </a:r>
             <a:endParaRPr lang="en-US" sz="1800" dirty="0"/>
           </a:p>
@@ -2755,9 +2755,9 @@
             <a:prstDash val="solid"/>
           </a:ln>
           <a:effectLst>
-            <a:outerShdw sx="100000" sy="100000" kx="0" ky="0" algn="bl" rotWithShape="0" blurRad="3.499409648131324e+107" dist="9.998313280375211e+106" dir="1.535235553616204e+126">
+            <a:outerShdw sx="100000" sy="100000" kx="0" ky="0" algn="bl" rotWithShape="0" blurRad="88900" dist="25400" dir="5400000">
               <a:srgbClr val="9AB4CC">
-                <a:alpha val="2.9999999999999997e+129"/>
+                <a:alpha val="30000"/>
               </a:srgbClr>
             </a:outerShdw>
           </a:effectLst>
@@ -2871,7 +2871,7 @@
                 <a:ea typeface="Aptos" pitchFamily="34" charset="-122"/>
                 <a:cs typeface="Aptos" pitchFamily="34" charset="-120"/>
               </a:rPr>
-              <a:t>Hackers or insiders reading data they have no right to see. Defend: passwords + MFA, per-role access rights, encryption — POPIA makes it a legal duty.</a:t>
+              <a:t>Hackers or insiders reading data they have no right to see. Defend: passwords + MFA, per-role access rights, encryption � POPIA makes it a legal duty.</a:t>
             </a:r>
             <a:endParaRPr lang="en-US" sz="1800" dirty="0"/>
           </a:p>
@@ -2903,9 +2903,9 @@
             <a:prstDash val="solid"/>
           </a:ln>
           <a:effectLst>
-            <a:outerShdw sx="100000" sy="100000" kx="0" ky="0" algn="bl" rotWithShape="0" blurRad="4.4442502531267815e+111" dist="1.2697857866076517e+111" dir="9.211413321697224e+130">
+            <a:outerShdw sx="100000" sy="100000" kx="0" ky="0" algn="bl" rotWithShape="0" blurRad="88900" dist="25400" dir="5400000">
               <a:srgbClr val="9AB4CC">
-                <a:alpha val="2.9999999999999996e+134"/>
+                <a:alpha val="30000"/>
               </a:srgbClr>
             </a:outerShdw>
           </a:effectLst>
@@ -3019,7 +3019,7 @@
                 <a:ea typeface="Aptos" pitchFamily="34" charset="-122"/>
                 <a:cs typeface="Aptos" pitchFamily="34" charset="-120"/>
               </a:rPr>
-              <a:t>Software that corrupts, steals or destroys data — in 2026 above all ransomware via phishing email. Defend: antivirus, patches, backups, cautious staff.</a:t>
+              <a:t>Software that corrupts, steals or destroys data � in 2026 above all ransomware via phishing email. Defend: antivirus, patches, backups, cautious staff.</a:t>
             </a:r>
             <a:endParaRPr lang="en-US" sz="1800" dirty="0"/>
           </a:p>
@@ -3051,9 +3051,9 @@
             <a:prstDash val="solid"/>
           </a:ln>
           <a:effectLst>
-            <a:outerShdw sx="100000" sy="100000" kx="0" ky="0" algn="bl" rotWithShape="0" blurRad="5.644197821471012e+115" dist="1.6126279489917177e+115" dir="5.526847993018334e+135">
+            <a:outerShdw sx="100000" sy="100000" kx="0" ky="0" algn="bl" rotWithShape="0" blurRad="88900" dist="25400" dir="5400000">
               <a:srgbClr val="9AB4CC">
-                <a:alpha val="2.9999999999999994e+139"/>
+                <a:alpha val="30000"/>
               </a:srgbClr>
             </a:outerShdw>
           </a:effectLst>
@@ -3238,7 +3238,7 @@
                 <a:ea typeface="Aptos" pitchFamily="34" charset="-122"/>
                 <a:cs typeface="Aptos" pitchFamily="34" charset="-120"/>
               </a:rPr>
-              <a:t>US 114050 Â· Lesson 4 â€” The business and its information needs Â· NQF 5</a:t>
+              <a:t>US 114050 · Lesson 4 — The business and its information needs · NQF 5</a:t>
             </a:r>
             <a:endParaRPr lang="en-US" sz="1800" dirty="0"/>
           </a:p>
@@ -4166,7 +4166,7 @@
                 <a:ea typeface="Aptos" pitchFamily="34" charset="-122"/>
                 <a:cs typeface="Aptos" pitchFamily="34" charset="-120"/>
               </a:rPr>
-              <a:t>US 114050 Â· Lesson 4 â€” The business and its information needs Â· NQF 5</a:t>
+              <a:t>US 114050 · Lesson 4 — The business and its information needs · NQF 5</a:t>
             </a:r>
             <a:endParaRPr lang="en-US" sz="1800" dirty="0"/>
           </a:p>
@@ -4335,9 +4335,9 @@
             <a:prstDash val="solid"/>
           </a:ln>
           <a:effectLst>
-            <a:outerShdw sx="100000" sy="100000" kx="0" ky="0" algn="bl" rotWithShape="0" blurRad="7.168131233268186e+119" dist="2.0480374952194813e+119" dir="3.3161087958110005e+140">
+            <a:outerShdw sx="100000" sy="100000" kx="0" ky="0" algn="bl" rotWithShape="0" blurRad="88900" dist="25400" dir="5400000">
               <a:srgbClr val="9AB4CC">
-                <a:alpha val="2.9999999999999996e+144"/>
+                <a:alpha val="30000"/>
               </a:srgbClr>
             </a:outerShdw>
           </a:effectLst>
@@ -4451,7 +4451,7 @@
                 <a:ea typeface="Aptos" pitchFamily="34" charset="-122"/>
                 <a:cs typeface="Aptos" pitchFamily="34" charset="-120"/>
               </a:rPr>
-              <a:t>90 minutes · Self &amp; Group — all 14 questions: data, information, the five roles, the three threats and the four sub-systems. AI-marked.</a:t>
+              <a:t>90 minutes � Self &amp; Group � all 14 questions: data, information, the five roles, the three threats and the four sub-systems. AI-marked.</a:t>
             </a:r>
             <a:endParaRPr lang="en-US" sz="1800" dirty="0"/>
           </a:p>
@@ -4483,9 +4483,9 @@
             <a:prstDash val="solid"/>
           </a:ln>
           <a:effectLst>
-            <a:outerShdw sx="100000" sy="100000" kx="0" ky="0" algn="bl" rotWithShape="0" blurRad="9.103526666250596e+123" dist="2.6010076189287412e+123" dir="1.9896652774866004e+145">
+            <a:outerShdw sx="100000" sy="100000" kx="0" ky="0" algn="bl" rotWithShape="0" blurRad="88900" dist="25400" dir="5400000">
               <a:srgbClr val="9AB4CC">
-                <a:alpha val="2.9999999999999996e+149"/>
+                <a:alpha val="30000"/>
               </a:srgbClr>
             </a:outerShdw>
           </a:effectLst>
@@ -4599,7 +4599,7 @@
                 <a:ea typeface="Aptos" pitchFamily="34" charset="-122"/>
                 <a:cs typeface="Aptos" pitchFamily="34" charset="-120"/>
               </a:rPr>
-              <a:t>Every section gates on its five questions — all correct unlocks Next.</a:t>
+              <a:t>Every section gates on its five questions � all correct unlocks Next.</a:t>
             </a:r>
             <a:endParaRPr lang="en-US" sz="1800" dirty="0"/>
           </a:p>
@@ -4631,9 +4631,9 @@
             <a:prstDash val="solid"/>
           </a:ln>
           <a:effectLst>
-            <a:outerShdw sx="100000" sy="100000" kx="0" ky="0" algn="bl" rotWithShape="0" blurRad="1.1561478866138256e+128" dist="3.303279676039501e+127" dir="1.1937991664919603e+150">
+            <a:outerShdw sx="100000" sy="100000" kx="0" ky="0" algn="bl" rotWithShape="0" blurRad="88900" dist="25400" dir="5400000">
               <a:srgbClr val="9AB4CC">
-                <a:alpha val="2.9999999999999997e+154"/>
+                <a:alpha val="30000"/>
               </a:srgbClr>
             </a:outerShdw>
           </a:effectLst>
@@ -4747,7 +4747,7 @@
                 <a:ea typeface="Aptos" pitchFamily="34" charset="-122"/>
                 <a:cs typeface="Aptos" pitchFamily="34" charset="-120"/>
               </a:rPr>
-              <a:t>“I am able to explain the relationship between a business and its data requirements” — tick it honestly, or write it down as a goal.</a:t>
+              <a:t>“I am able to explain the relationship between a business and its data requirements” � tick it honestly, or write it down as a goal.</a:t>
             </a:r>
             <a:endParaRPr lang="en-US" sz="1800" dirty="0"/>
           </a:p>
@@ -4779,9 +4779,9 @@
             <a:prstDash val="solid"/>
           </a:ln>
           <a:effectLst>
-            <a:outerShdw sx="100000" sy="100000" kx="0" ky="0" algn="bl" rotWithShape="0" blurRad="1.4683078159995586e+132" dist="4.195165188570166e+131" dir="7.162794998951762e+154">
+            <a:outerShdw sx="100000" sy="100000" kx="0" ky="0" algn="bl" rotWithShape="0" blurRad="88900" dist="25400" dir="5400000">
               <a:srgbClr val="9AB4CC">
-                <a:alpha val="2.9999999999999998e+159"/>
+                <a:alpha val="30000"/>
               </a:srgbClr>
             </a:outerShdw>
           </a:effectLst>
@@ -4853,7 +4853,7 @@
                 <a:ea typeface="Aptos Display" pitchFamily="34" charset="-122"/>
                 <a:cs typeface="Aptos Display" pitchFamily="34" charset="-120"/>
               </a:rPr>
-              <a:t>Logbook project — Research</a:t>
+              <a:t>Logbook project � Research</a:t>
             </a:r>
             <a:endParaRPr lang="en-US" sz="2000" dirty="0"/>
           </a:p>
@@ -4966,7 +4966,7 @@
                 <a:ea typeface="Aptos" pitchFamily="34" charset="-122"/>
                 <a:cs typeface="Aptos" pitchFamily="34" charset="-120"/>
               </a:rPr>
-              <a:t>US 114050 Â· Lesson 4 â€” The business and its information needs Â· NQF 5</a:t>
+              <a:t>US 114050 · Lesson 4 — The business and its information needs · NQF 5</a:t>
             </a:r>
             <a:endParaRPr lang="en-US" sz="1800" dirty="0"/>
           </a:p>
@@ -5156,7 +5156,7 @@
                 <a:ea typeface="Aptos" pitchFamily="34" charset="-122"/>
                 <a:cs typeface="Aptos" pitchFamily="34" charset="-120"/>
               </a:rPr>
-              <a:t>Data → information → knowledge → understanding → wisdom · decisions, price control, quality (PDCA), marketing and BPM · guard it against unauthorised access, malware and insiders · give HR, Production, Marketing and Finance the information they need.</a:t>
+              <a:t>Data → information → knowledge → understanding → wisdom � decisions, price control, quality (PDCA), marketing and BPM � guard it against unauthorised access, malware and insiders � give HR, Production, Marketing and Finance the information they need.</a:t>
             </a:r>
             <a:endParaRPr lang="en-US" sz="1800" dirty="0"/>
           </a:p>
@@ -5195,7 +5195,7 @@
                 <a:ea typeface="Aptos" pitchFamily="34" charset="-122"/>
                 <a:cs typeface="Aptos" pitchFamily="34" charset="-120"/>
               </a:rPr>
-              <a:t>US 114050 · National Certificate: IT — System Support · SAQA ID 48573 · ITSS Learn</a:t>
+              <a:t>US 114050 � National Certificate: IT � System Support � SAQA ID 48573 � ITSS Learn</a:t>
             </a:r>
             <a:endParaRPr lang="en-US" sz="1800" dirty="0"/>
           </a:p>
@@ -5266,7 +5266,7 @@
                 <a:ea typeface="Aptos" pitchFamily="34" charset="-122"/>
                 <a:cs typeface="Aptos" pitchFamily="34" charset="-120"/>
               </a:rPr>
-              <a:t>US 114050 Â· Lesson 4 â€” The business and its information needs Â· NQF 5</a:t>
+              <a:t>US 114050 · Lesson 4 — The business and its information needs · NQF 5</a:t>
             </a:r>
             <a:endParaRPr lang="en-US" sz="1800" dirty="0"/>
           </a:p>
@@ -5593,7 +5593,7 @@
                 <a:ea typeface="Aptos" pitchFamily="34" charset="-122"/>
                 <a:cs typeface="Aptos" pitchFamily="34" charset="-120"/>
               </a:rPr>
-              <a:t>Symbols — raw facts with no significance beyond their existence.</a:t>
+              <a:t>Symbols � raw facts with no significance beyond their existence.</a:t>
             </a:r>
             <a:endParaRPr lang="en-US" sz="1800" dirty="0"/>
           </a:p>
@@ -5625,9 +5625,9 @@
             <a:prstDash val="solid"/>
           </a:ln>
           <a:effectLst>
-            <a:outerShdw sx="100000" sy="100000" kx="0" ky="0" algn="bl" rotWithShape="0" blurRad="1129030000" dist="322580000" dir="324000000000">
+            <a:outerShdw sx="100000" sy="100000" kx="0" ky="0" algn="bl" rotWithShape="0" blurRad="88900" dist="25400" dir="5400000">
               <a:srgbClr val="9AB4CC">
-                <a:alpha val="3000000000"/>
+                <a:alpha val="30000"/>
               </a:srgbClr>
             </a:outerShdw>
           </a:effectLst>
@@ -5741,7 +5741,7 @@
                 <a:ea typeface="Aptos" pitchFamily="34" charset="-122"/>
                 <a:cs typeface="Aptos" pitchFamily="34" charset="-120"/>
               </a:rPr>
-              <a:t>Data processed to be useful — answers who, what, where, when.</a:t>
+              <a:t>Data processed to be useful � answers who, what, where, when.</a:t>
             </a:r>
             <a:endParaRPr lang="en-US" sz="1800" dirty="0"/>
           </a:p>
@@ -5773,9 +5773,9 @@
             <a:prstDash val="solid"/>
           </a:ln>
           <a:effectLst>
-            <a:outerShdw sx="100000" sy="100000" kx="0" ky="0" algn="bl" rotWithShape="0" blurRad="14338681000000" dist="4096766000000" dir="19440000000000000">
+            <a:outerShdw sx="100000" sy="100000" kx="0" ky="0" algn="bl" rotWithShape="0" blurRad="88900" dist="25400" dir="5400000">
               <a:srgbClr val="9AB4CC">
-                <a:alpha val="300000000000000"/>
+                <a:alpha val="30000"/>
               </a:srgbClr>
             </a:outerShdw>
           </a:effectLst>
@@ -5889,7 +5889,7 @@
                 <a:ea typeface="Aptos" pitchFamily="34" charset="-122"/>
                 <a:cs typeface="Aptos" pitchFamily="34" charset="-120"/>
               </a:rPr>
-              <a:t>Application of data and information — answers how.</a:t>
+              <a:t>Application of data and information � answers how.</a:t>
             </a:r>
             <a:endParaRPr lang="en-US" sz="1800" dirty="0"/>
           </a:p>
@@ -5921,9 +5921,9 @@
             <a:prstDash val="solid"/>
           </a:ln>
           <a:effectLst>
-            <a:outerShdw sx="100000" sy="100000" kx="0" ky="0" algn="bl" rotWithShape="0" blurRad="182101248700000000" dist="52028928200000000" dir="1.1664e+21">
+            <a:outerShdw sx="100000" sy="100000" kx="0" ky="0" algn="bl" rotWithShape="0" blurRad="88900" dist="25400" dir="5400000">
               <a:srgbClr val="9AB4CC">
-                <a:alpha val="30000000000000000000"/>
+                <a:alpha val="30000"/>
               </a:srgbClr>
             </a:outerShdw>
           </a:effectLst>
@@ -6037,7 +6037,7 @@
                 <a:ea typeface="Aptos" pitchFamily="34" charset="-122"/>
                 <a:cs typeface="Aptos" pitchFamily="34" charset="-120"/>
               </a:rPr>
-              <a:t>Appreciation of why — carries each level to the next.</a:t>
+              <a:t>Appreciation of why � carries each level to the next.</a:t>
             </a:r>
             <a:endParaRPr lang="en-US" sz="1800" dirty="0"/>
           </a:p>
@@ -6069,9 +6069,9 @@
             <a:prstDash val="solid"/>
           </a:ln>
           <a:effectLst>
-            <a:outerShdw sx="100000" sy="100000" kx="0" ky="0" algn="bl" rotWithShape="0" blurRad="2.31268585849e+21" dist="660767388140000000000" dir="6.9984e+25">
+            <a:outerShdw sx="100000" sy="100000" kx="0" ky="0" algn="bl" rotWithShape="0" blurRad="88900" dist="25400" dir="5400000">
               <a:srgbClr val="9AB4CC">
-                <a:alpha val="3e+24"/>
+                <a:alpha val="30000"/>
               </a:srgbClr>
             </a:outerShdw>
           </a:effectLst>
@@ -6185,7 +6185,7 @@
                 <a:ea typeface="Aptos" pitchFamily="34" charset="-122"/>
                 <a:cs typeface="Aptos" pitchFamily="34" charset="-120"/>
               </a:rPr>
-              <a:t>Evaluated understanding — vision and design.</a:t>
+              <a:t>Evaluated understanding � vision and design.</a:t>
             </a:r>
             <a:endParaRPr lang="en-US" sz="1800" dirty="0"/>
           </a:p>
@@ -6217,9 +6217,9 @@
             <a:prstDash val="solid"/>
           </a:ln>
           <a:effectLst>
-            <a:outerShdw sx="100000" sy="100000" kx="0" ky="0" algn="bl" rotWithShape="0" blurRad="2.9371110402823e+25" dist="8.391745829378e+24" dir="4.19904e+30">
+            <a:outerShdw sx="100000" sy="100000" kx="0" ky="0" algn="bl" rotWithShape="0" blurRad="88900" dist="25400" dir="5400000">
               <a:srgbClr val="9AB4CC">
-                <a:alpha val="3e+29"/>
+                <a:alpha val="30000"/>
               </a:srgbClr>
             </a:outerShdw>
           </a:effectLst>
@@ -6300,7 +6300,7 @@
                 <a:ea typeface="Aptos" pitchFamily="34" charset="-122"/>
                 <a:cs typeface="Aptos" pitchFamily="34" charset="-120"/>
               </a:rPr>
-              <a:t>The first four categories deal with the past — what has been or what is known. Only wisdom deals with the future; people must move successively through the other categories to reach it.</a:t>
+              <a:t>The first four categories deal with the past � what has been or what is known. Only wisdom deals with the future; people must move successively through the other categories to reach it.</a:t>
             </a:r>
             <a:endParaRPr lang="en-US" sz="1800" dirty="0"/>
           </a:p>
@@ -6371,7 +6371,7 @@
                 <a:ea typeface="Aptos" pitchFamily="34" charset="-122"/>
                 <a:cs typeface="Aptos" pitchFamily="34" charset="-120"/>
               </a:rPr>
-              <a:t>US 114050 Â· Lesson 4 â€” The business and its information needs Â· NQF 5</a:t>
+              <a:t>US 114050 · Lesson 4 — The business and its information needs · NQF 5</a:t>
             </a:r>
             <a:endParaRPr lang="en-US" sz="1800" dirty="0"/>
           </a:p>
@@ -6540,9 +6540,9 @@
             <a:prstDash val="solid"/>
           </a:ln>
           <a:effectLst>
-            <a:outerShdw sx="100000" sy="100000" kx="0" ky="0" algn="bl" rotWithShape="0" blurRad="3.730131021158521e+29" dist="1.0657517203310059e+29" dir="2.519424e+35">
+            <a:outerShdw sx="100000" sy="100000" kx="0" ky="0" algn="bl" rotWithShape="0" blurRad="88900" dist="25400" dir="5400000">
               <a:srgbClr val="9AB4CC">
-                <a:alpha val="2.9999999999999997e+34"/>
+                <a:alpha val="30000"/>
               </a:srgbClr>
             </a:outerShdw>
           </a:effectLst>
@@ -6656,7 +6656,7 @@
                 <a:ea typeface="Aptos" pitchFamily="34" charset="-122"/>
                 <a:cs typeface="Aptos" pitchFamily="34" charset="-120"/>
               </a:rPr>
-              <a:t>It simply exists — usable or not — and has no meaning of itself. In computer terms, a spreadsheet generally starts out by holding data.</a:t>
+              <a:t>It simply exists � usable or not � and has no meaning of itself. In computer terms, a spreadsheet generally starts out by holding data.</a:t>
             </a:r>
             <a:endParaRPr lang="en-US" sz="1800" dirty="0"/>
           </a:p>
@@ -6688,9 +6688,9 @@
             <a:prstDash val="solid"/>
           </a:ln>
           <a:effectLst>
-            <a:outerShdw sx="100000" sy="100000" kx="0" ky="0" algn="bl" rotWithShape="0" blurRad="4.737266396871321e+33" dist="1.3535046848203775e+33" dir="1.5116544e+40">
+            <a:outerShdw sx="100000" sy="100000" kx="0" ky="0" algn="bl" rotWithShape="0" blurRad="88900" dist="25400" dir="5400000">
               <a:srgbClr val="9AB4CC">
-                <a:alpha val="3e+39"/>
+                <a:alpha val="30000"/>
               </a:srgbClr>
             </a:outerShdw>
           </a:effectLst>
@@ -6836,9 +6836,9 @@
             <a:prstDash val="solid"/>
           </a:ln>
           <a:effectLst>
-            <a:outerShdw sx="100000" sy="100000" kx="0" ky="0" algn="bl" rotWithShape="0" blurRad="6.016328324026578e+37" dist="1.7189509497218795e+37" dir="9.069926400000001e+44">
+            <a:outerShdw sx="100000" sy="100000" kx="0" ky="0" algn="bl" rotWithShape="0" blurRad="88900" dist="25400" dir="5400000">
               <a:srgbClr val="9AB4CC">
-                <a:alpha val="3e+44"/>
+                <a:alpha val="30000"/>
               </a:srgbClr>
             </a:outerShdw>
           </a:effectLst>
@@ -6919,7 +6919,7 @@
                 <a:ea typeface="Aptos" pitchFamily="34" charset="-122"/>
                 <a:cs typeface="Aptos" pitchFamily="34" charset="-120"/>
               </a:rPr>
-              <a:t>Data: “It is raining.”  ·  Information: “The temperature dropped 15 degrees and then it started raining” — a relationship, possibly cause and effect.</a:t>
+              <a:t>Data: “It is raining.”  �  Information: “The temperature dropped 15 degrees and then it started raining” � a relationship, possibly cause and effect.</a:t>
             </a:r>
             <a:endParaRPr lang="en-US" sz="1800" dirty="0"/>
           </a:p>
@@ -6990,7 +6990,7 @@
                 <a:ea typeface="Aptos" pitchFamily="34" charset="-122"/>
                 <a:cs typeface="Aptos" pitchFamily="34" charset="-120"/>
               </a:rPr>
-              <a:t>US 114050 Â· Lesson 4 â€” The business and its information needs Â· NQF 5</a:t>
+              <a:t>US 114050 · Lesson 4 — The business and its information needs · NQF 5</a:t>
             </a:r>
             <a:endParaRPr lang="en-US" sz="1800" dirty="0"/>
           </a:p>
@@ -7159,9 +7159,9 @@
             <a:prstDash val="solid"/>
           </a:ln>
           <a:effectLst>
-            <a:outerShdw sx="100000" sy="100000" kx="0" ky="0" algn="bl" rotWithShape="0" blurRad="7.640736971513755e+41" dist="2.183067706146787e+41" dir="5.44195584e+49">
+            <a:outerShdw sx="100000" sy="100000" kx="0" ky="0" algn="bl" rotWithShape="0" blurRad="88900" dist="25400" dir="5400000">
               <a:srgbClr val="9AB4CC">
-                <a:alpha val="2.9999999999999997e+49"/>
+                <a:alpha val="30000"/>
               </a:srgbClr>
             </a:outerShdw>
           </a:effectLst>
@@ -7275,7 +7275,7 @@
                 <a:ea typeface="Aptos" pitchFamily="34" charset="-122"/>
                 <a:cs typeface="Aptos" pitchFamily="34" charset="-120"/>
               </a:rPr>
-              <a:t>The appropriate collection of information — memorised, deterministic. The times table answers 2 × 2, but not 1267 × 300.</a:t>
+              <a:t>The appropriate collection of information � memorised, deterministic. The times table answers 2 × 2, but not 1267 × 300.</a:t>
             </a:r>
             <a:endParaRPr lang="en-US" sz="1800" dirty="0"/>
           </a:p>
@@ -7307,9 +7307,9 @@
             <a:prstDash val="solid"/>
           </a:ln>
           <a:effectLst>
-            <a:outerShdw sx="100000" sy="100000" kx="0" ky="0" algn="bl" rotWithShape="0" blurRad="9.703735953822469e+45" dist="2.7724959868064195e+45" dir="3.2651735040000005e+54">
+            <a:outerShdw sx="100000" sy="100000" kx="0" ky="0" algn="bl" rotWithShape="0" blurRad="88900" dist="25400" dir="5400000">
               <a:srgbClr val="9AB4CC">
-                <a:alpha val="2.9999999999999996e+54"/>
+                <a:alpha val="30000"/>
               </a:srgbClr>
             </a:outerShdw>
           </a:effectLst>
@@ -7423,7 +7423,7 @@
                 <a:ea typeface="Aptos" pitchFamily="34" charset="-122"/>
                 <a:cs typeface="Aptos" pitchFamily="34" charset="-120"/>
               </a:rPr>
-              <a:t>Cognitive and analytical — synthesises NEW knowledge from what is known. Learning, not memorising. AI systems (2026: Copilot, Gemini) do this at scale.</a:t>
+              <a:t>Cognitive and analytical � synthesises NEW knowledge from what is known. Learning, not memorising. AI systems (2026: Copilot, Gemini) do this at scale.</a:t>
             </a:r>
             <a:endParaRPr lang="en-US" sz="1800" dirty="0"/>
           </a:p>
@@ -7455,9 +7455,9 @@
             <a:prstDash val="solid"/>
           </a:ln>
           <a:effectLst>
-            <a:outerShdw sx="100000" sy="100000" kx="0" ky="0" algn="bl" rotWithShape="0" blurRad="1.2323744661354536e+50" dist="3.5210699032441527e+49" dir="1.9591041024000004e+59">
+            <a:outerShdw sx="100000" sy="100000" kx="0" ky="0" algn="bl" rotWithShape="0" blurRad="88900" dist="25400" dir="5400000">
               <a:srgbClr val="9AB4CC">
-                <a:alpha val="2.9999999999999996e+59"/>
+                <a:alpha val="30000"/>
               </a:srgbClr>
             </a:outerShdw>
           </a:effectLst>
@@ -7603,9 +7603,9 @@
             <a:prstDash val="solid"/>
           </a:ln>
           <a:effectLst>
-            <a:outerShdw sx="100000" sy="100000" kx="0" ky="0" algn="bl" rotWithShape="0" blurRad="1.5651155719920262e+54" dist="4.471758777120074e+53" dir="1.1754624614400003e+64">
+            <a:outerShdw sx="100000" sy="100000" kx="0" ky="0" algn="bl" rotWithShape="0" blurRad="88900" dist="25400" dir="5400000">
               <a:srgbClr val="9AB4CC">
-                <a:alpha val="2.9999999999999996e+64"/>
+                <a:alpha val="30000"/>
               </a:srgbClr>
             </a:outerShdw>
           </a:effectLst>
@@ -7686,7 +7686,7 @@
                 <a:ea typeface="Aptos" pitchFamily="34" charset="-122"/>
                 <a:cs typeface="Aptos" pitchFamily="34" charset="-120"/>
               </a:rPr>
-              <a:t>Knowledge: high humidity + a sharp temperature drop usually means rain. Wisdom is systemic: “it rains because it rains” — grasping all the interactions between evaporation, air currents and temperature gradients.</a:t>
+              <a:t>Knowledge: high humidity + a sharp temperature drop usually means rain. Wisdom is systemic: “it rains because it rains” � grasping all the interactions between evaporation, air currents and temperature gradients.</a:t>
             </a:r>
             <a:endParaRPr lang="en-US" sz="1800" dirty="0"/>
           </a:p>
@@ -7757,7 +7757,7 @@
                 <a:ea typeface="Aptos" pitchFamily="34" charset="-122"/>
                 <a:cs typeface="Aptos" pitchFamily="34" charset="-120"/>
               </a:rPr>
-              <a:t>US 114050 Â· Lesson 4 â€” The business and its information needs Â· NQF 5</a:t>
+              <a:t>US 114050 · Lesson 4 — The business and its information needs · NQF 5</a:t>
             </a:r>
             <a:endParaRPr lang="en-US" sz="1800" dirty="0"/>
           </a:p>
@@ -7894,7 +7894,7 @@
                 <a:ea typeface="Aptos Display" pitchFamily="34" charset="-122"/>
                 <a:cs typeface="Aptos Display" pitchFamily="34" charset="-120"/>
               </a:rPr>
-              <a:t>When is a pattern knowledge — and when is it noise?</a:t>
+              <a:t>When is a pattern knowledge � and when is it noise?</a:t>
             </a:r>
             <a:endParaRPr lang="en-US" sz="3000" dirty="0"/>
           </a:p>
@@ -7940,7 +7940,7 @@
                 <a:ea typeface="Aptos" pitchFamily="34" charset="-122"/>
                 <a:cs typeface="Aptos" pitchFamily="34" charset="-120"/>
               </a:rPr>
-              <a:t>“Abugt dbesbt regtc uatn s uitrzt…” — 100% novelty. To you it is noise; there is no foundation to connect with the pattern. Yet translated, these are Newton's three laws of motion.</a:t>
+              <a:t>“Abugt dbesbt regtc uatn s uitrzt…” � 100% novelty. To you it is noise; there is no foundation to connect with the pattern. Yet translated, these are Newton's three laws of motion.</a:t>
             </a:r>
             <a:endParaRPr lang="en-US" sz="1800" dirty="0"/>
           </a:p>
@@ -8012,7 +8012,7 @@
                 <a:ea typeface="Aptos" pitchFamily="34" charset="-122"/>
                 <a:cs typeface="Aptos" pitchFamily="34" charset="-120"/>
               </a:rPr>
-              <a:t>A refrigerator — at some point you connected with the pattern, and every further statement only confirmed it. In a society without refrigerators, it stays a riddle.</a:t>
+              <a:t>A refrigerator � at some point you connected with the pattern, and every further statement only confirmed it. In a society without refrigerators, it stays a riddle.</a:t>
             </a:r>
             <a:endParaRPr lang="en-US" sz="1800" dirty="0"/>
           </a:p>
@@ -8044,9 +8044,9 @@
             <a:prstDash val="solid"/>
           </a:ln>
           <a:effectLst>
-            <a:outerShdw sx="100000" sy="100000" kx="0" ky="0" algn="bl" rotWithShape="0" blurRad="1.9876967764298733e+58" dist="5.679133646942494e+57" dir="7.052774768640002e+68">
+            <a:outerShdw sx="100000" sy="100000" kx="0" ky="0" algn="bl" rotWithShape="0" blurRad="88900" dist="25400" dir="5400000">
               <a:srgbClr val="9AB4CC">
-                <a:alpha val="2.9999999999999995e+69"/>
+                <a:alpha val="30000"/>
               </a:srgbClr>
             </a:outerShdw>
           </a:effectLst>
@@ -8127,7 +8127,7 @@
                 <a:ea typeface="Aptos" pitchFamily="34" charset="-122"/>
                 <a:cs typeface="Aptos" pitchFamily="34" charset="-120"/>
               </a:rPr>
-              <a:t>Information only becomes knowledge when the receiver can connect it to a pattern they understand — present information in the language and context of its users, or it is noise.</a:t>
+              <a:t>Information only becomes knowledge when the receiver can connect it to a pattern they understand � present information in the language and context of its users, or it is noise.</a:t>
             </a:r>
             <a:endParaRPr lang="en-US" sz="1800" dirty="0"/>
           </a:p>
@@ -8198,7 +8198,7 @@
                 <a:ea typeface="Aptos" pitchFamily="34" charset="-122"/>
                 <a:cs typeface="Aptos" pitchFamily="34" charset="-120"/>
               </a:rPr>
-              <a:t>US 114050 Â· Lesson 4 â€” The business and its information needs Â· NQF 5</a:t>
+              <a:t>US 114050 · Lesson 4 — The business and its information needs · NQF 5</a:t>
             </a:r>
             <a:endParaRPr lang="en-US" sz="1800" dirty="0"/>
           </a:p>
@@ -8381,7 +8381,7 @@
                 <a:ea typeface="Aptos" pitchFamily="34" charset="-122"/>
                 <a:cs typeface="Aptos" pitchFamily="34" charset="-120"/>
               </a:rPr>
-              <a:t>Decision making is the cognitive process leading to the selection of a course of action among variations — every process produces a final choice: an action or an opinion.</a:t>
+              <a:t>Decision making is the cognitive process leading to the selection of a course of action among variations � every process produces a final choice: an action or an opinion.</a:t>
             </a:r>
             <a:endParaRPr lang="en-US" sz="1800" dirty="0"/>
           </a:p>
@@ -8405,7 +8405,7 @@
                 <a:ea typeface="Aptos" pitchFamily="34" charset="-122"/>
                 <a:cs typeface="Aptos" pitchFamily="34" charset="-120"/>
               </a:rPr>
-              <a:t>It begins when we need to do something but know not what — a reasoning process, rational or irrational, on explicit or tacit assumptions.</a:t>
+              <a:t>It begins when we need to do something but know not what � a reasoning process, rational or irrational, on explicit or tacit assumptions.</a:t>
             </a:r>
             <a:endParaRPr lang="en-US" sz="1800" dirty="0"/>
           </a:p>
@@ -8429,7 +8429,7 @@
                 <a:ea typeface="Aptos" pitchFamily="34" charset="-122"/>
                 <a:cs typeface="Aptos" pitchFamily="34" charset="-120"/>
               </a:rPr>
-              <a:t>Structured, rational decisions drive science-based professions — e.g. medical diagnosis, then treatment selection.</a:t>
+              <a:t>Structured, rational decisions drive science-based professions � e.g. medical diagnosis, then treatment selection.</a:t>
             </a:r>
             <a:endParaRPr lang="en-US" sz="1800" dirty="0"/>
           </a:p>
@@ -8548,7 +8548,7 @@
                 <a:ea typeface="Aptos" pitchFamily="34" charset="-122"/>
                 <a:cs typeface="Aptos" pitchFamily="34" charset="-120"/>
               </a:rPr>
-              <a:t>US 114050 Â· Lesson 4 â€” The business and its information needs Â· NQF 5</a:t>
+              <a:t>US 114050 · Lesson 4 — The business and its information needs · NQF 5</a:t>
             </a:r>
             <a:endParaRPr lang="en-US" sz="1800" dirty="0"/>
           </a:p>
@@ -8717,9 +8717,9 @@
             <a:prstDash val="solid"/>
           </a:ln>
           <a:effectLst>
-            <a:outerShdw sx="100000" sy="100000" kx="0" ky="0" algn="bl" rotWithShape="0" blurRad="2.524374906065939e+62" dist="7.212499731616968e+61" dir="4.2316648611840007e+73">
+            <a:outerShdw sx="100000" sy="100000" kx="0" ky="0" algn="bl" rotWithShape="0" blurRad="88900" dist="25400" dir="5400000">
               <a:srgbClr val="9AB4CC">
-                <a:alpha val="2.9999999999999995e+74"/>
+                <a:alpha val="30000"/>
               </a:srgbClr>
             </a:outerShdw>
           </a:effectLst>
@@ -8833,7 +8833,7 @@
                 <a:ea typeface="Aptos" pitchFamily="34" charset="-122"/>
                 <a:cs typeface="Aptos" pitchFamily="34" charset="-120"/>
               </a:rPr>
-              <a:t>Prices set by supply and demand — signals between producers and consumers that ration supplies, distribute income and allocate resources.</a:t>
+              <a:t>Prices set by supply and demand � signals between producers and consumers that ration supplies, distribute income and allocate resources.</a:t>
             </a:r>
             <a:endParaRPr lang="en-US" sz="1800" dirty="0"/>
           </a:p>
@@ -8865,9 +8865,9 @@
             <a:prstDash val="solid"/>
           </a:ln>
           <a:effectLst>
-            <a:outerShdw sx="100000" sy="100000" kx="0" ky="0" algn="bl" rotWithShape="0" blurRad="3.2059561307037426e+66" dist="9.15987465915355e+65" dir="2.5389989167104004e+78">
+            <a:outerShdw sx="100000" sy="100000" kx="0" ky="0" algn="bl" rotWithShape="0" blurRad="88900" dist="25400" dir="5400000">
               <a:srgbClr val="9AB4CC">
-                <a:alpha val="3e+79"/>
+                <a:alpha val="30000"/>
               </a:srgbClr>
             </a:outerShdw>
           </a:effectLst>
@@ -9013,9 +9013,9 @@
             <a:prstDash val="solid"/>
           </a:ln>
           <a:effectLst>
-            <a:outerShdw sx="100000" sy="100000" kx="0" ky="0" algn="bl" rotWithShape="0" blurRad="4.071564285993753e+70" dist="1.1633040817125008e+70" dir="1.5233993500262402e+83">
+            <a:outerShdw sx="100000" sy="100000" kx="0" ky="0" algn="bl" rotWithShape="0" blurRad="88900" dist="25400" dir="5400000">
               <a:srgbClr val="9AB4CC">
-                <a:alpha val="2.9999999999999995e+84"/>
+                <a:alpha val="30000"/>
               </a:srgbClr>
             </a:outerShdw>
           </a:effectLst>
@@ -9167,7 +9167,7 @@
                 <a:ea typeface="Aptos" pitchFamily="34" charset="-122"/>
                 <a:cs typeface="Aptos" pitchFamily="34" charset="-120"/>
               </a:rPr>
-              <a:t>US 114050 Â· Lesson 4 â€” The business and its information needs Â· NQF 5</a:t>
+              <a:t>US 114050 · Lesson 4 — The business and its information needs · NQF 5</a:t>
             </a:r>
             <a:endParaRPr lang="en-US" sz="1800" dirty="0"/>
           </a:p>
@@ -9346,7 +9346,7 @@
                 <a:ea typeface="Aptos" pitchFamily="34" charset="-122"/>
                 <a:cs typeface="Aptos" pitchFamily="34" charset="-120"/>
               </a:rPr>
-              <a:t>Quality systems ensure products and services meet or exceed customer requirements — “fit for purpose”, “do it right the first time”. QA covers design through documentation.</a:t>
+              <a:t>Quality systems ensure products and services meet or exceed customer requirements � “fit for purpose”, “do it right the first time”. QA covers design through documentation.</a:t>
             </a:r>
             <a:endParaRPr lang="en-US" sz="1800" dirty="0"/>
           </a:p>
@@ -9378,9 +9378,9 @@
             <a:prstDash val="solid"/>
           </a:ln>
           <a:effectLst>
-            <a:outerShdw sx="100000" sy="100000" kx="0" ky="0" algn="bl" rotWithShape="0" blurRad="5.170886643212067e+74" dist="1.477396183774876e+74" dir="9.14039610015744e+87">
+            <a:outerShdw sx="100000" sy="100000" kx="0" ky="0" algn="bl" rotWithShape="0" blurRad="88900" dist="25400" dir="5400000">
               <a:srgbClr val="9AB4CC">
-                <a:alpha val="2.9999999999999996e+89"/>
+                <a:alpha val="30000"/>
               </a:srgbClr>
             </a:outerShdw>
           </a:effectLst>
@@ -9526,9 +9526,9 @@
             <a:prstDash val="solid"/>
           </a:ln>
           <a:effectLst>
-            <a:outerShdw sx="100000" sy="100000" kx="0" ky="0" algn="bl" rotWithShape="0" blurRad="6.567026036879325e+78" dist="1.8762931533940924e+78" dir="5.484237660094465e+92">
+            <a:outerShdw sx="100000" sy="100000" kx="0" ky="0" algn="bl" rotWithShape="0" blurRad="88900" dist="25400" dir="5400000">
               <a:srgbClr val="9AB4CC">
-                <a:alpha val="2.9999999999999997e+94"/>
+                <a:alpha val="30000"/>
               </a:srgbClr>
             </a:outerShdw>
           </a:effectLst>
@@ -9674,9 +9674,9 @@
             <a:prstDash val="solid"/>
           </a:ln>
           <a:effectLst>
-            <a:outerShdw sx="100000" sy="100000" kx="0" ky="0" algn="bl" rotWithShape="0" blurRad="8.340123066836742e+82" dist="2.3828923048104974e+82" dir="3.2905425960566786e+97">
+            <a:outerShdw sx="100000" sy="100000" kx="0" ky="0" algn="bl" rotWithShape="0" blurRad="88900" dist="25400" dir="5400000">
               <a:srgbClr val="9AB4CC">
-                <a:alpha val="2.9999999999999997e+99"/>
+                <a:alpha val="30000"/>
               </a:srgbClr>
             </a:outerShdw>
           </a:effectLst>
@@ -9822,9 +9822,9 @@
             <a:prstDash val="solid"/>
           </a:ln>
           <a:effectLst>
-            <a:outerShdw sx="100000" sy="100000" kx="0" ky="0" algn="bl" rotWithShape="0" blurRad="1.0591956294882662e+87" dist="3.0262732271093317e+86" dir="1.9743255576340073e+102">
+            <a:outerShdw sx="100000" sy="100000" kx="0" ky="0" algn="bl" rotWithShape="0" blurRad="88900" dist="25400" dir="5400000">
               <a:srgbClr val="9AB4CC">
-                <a:alpha val="3e+104"/>
+                <a:alpha val="30000"/>
               </a:srgbClr>
             </a:outerShdw>
           </a:effectLst>
@@ -9970,9 +9970,9 @@
             <a:prstDash val="solid"/>
           </a:ln>
           <a:effectLst>
-            <a:outerShdw sx="100000" sy="100000" kx="0" ky="0" algn="bl" rotWithShape="0" blurRad="1.3451784494500981e+91" dist="3.8433669984288512e+90" dir="1.1845953345804043e+107">
+            <a:outerShdw sx="100000" sy="100000" kx="0" ky="0" algn="bl" rotWithShape="0" blurRad="88900" dist="25400" dir="5400000">
               <a:srgbClr val="9AB4CC">
-                <a:alpha val="2.9999999999999997e+109"/>
+                <a:alpha val="30000"/>
               </a:srgbClr>
             </a:outerShdw>
           </a:effectLst>
@@ -10053,7 +10053,7 @@
                 <a:ea typeface="Aptos" pitchFamily="34" charset="-122"/>
                 <a:cs typeface="Aptos" pitchFamily="34" charset="-120"/>
               </a:rPr>
-              <a:t>Competitors' items are checked and measured against the organisation's own quality — that comparison depends on communication.</a:t>
+              <a:t>Competitors' items are checked and measured against the organisation's own quality � that comparison depends on communication.</a:t>
             </a:r>
             <a:endParaRPr lang="en-US" sz="1800" dirty="0"/>
           </a:p>
@@ -10124,7 +10124,7 @@
                 <a:ea typeface="Aptos" pitchFamily="34" charset="-122"/>
                 <a:cs typeface="Aptos" pitchFamily="34" charset="-120"/>
               </a:rPr>
-              <a:t>US 114050 Â· Lesson 4 â€” The business and its information needs Â· NQF 5</a:t>
+              <a:t>US 114050 · Lesson 4 — The business and its information needs · NQF 5</a:t>
             </a:r>
             <a:endParaRPr lang="en-US" sz="1800" dirty="0"/>
           </a:p>
@@ -10293,9 +10293,9 @@
             <a:prstDash val="solid"/>
           </a:ln>
           <a:effectLst>
-            <a:outerShdw sx="100000" sy="100000" kx="0" ky="0" algn="bl" rotWithShape="0" blurRad="1.7083766308016246e+95" dist="4.8810760880046414e+94" dir="7.107572007482426e+111">
+            <a:outerShdw sx="100000" sy="100000" kx="0" ky="0" algn="bl" rotWithShape="0" blurRad="88900" dist="25400" dir="5400000">
               <a:srgbClr val="9AB4CC">
-                <a:alpha val="2.9999999999999995e+114"/>
+                <a:alpha val="30000"/>
               </a:srgbClr>
             </a:outerShdw>
           </a:effectLst>
@@ -10441,9 +10441,9 @@
             <a:prstDash val="solid"/>
           </a:ln>
           <a:effectLst>
-            <a:outerShdw sx="100000" sy="100000" kx="0" ky="0" algn="bl" rotWithShape="0" blurRad="2.1696383211180632e+99" dist="6.198966631765894e+98" dir="4.2645432044894554e+116">
+            <a:outerShdw sx="100000" sy="100000" kx="0" ky="0" algn="bl" rotWithShape="0" blurRad="88900" dist="25400" dir="5400000">
               <a:srgbClr val="9AB4CC">
-                <a:alpha val="2.9999999999999997e+119"/>
+                <a:alpha val="30000"/>
               </a:srgbClr>
             </a:outerShdw>
           </a:effectLst>
@@ -10557,7 +10557,7 @@
                 <a:ea typeface="Aptos" pitchFamily="34" charset="-122"/>
                 <a:cs typeface="Aptos" pitchFamily="34" charset="-120"/>
               </a:rPr>
-              <a:t>Processes that organise, automate and analyse the metrics, processes and systems driving performance — the next generation of business intelligence (BI).</a:t>
+              <a:t>Processes that organise, automate and analyse the metrics, processes and systems driving performance � the next generation of business intelligence (BI).</a:t>
             </a:r>
             <a:endParaRPr lang="en-US" sz="1800" dirty="0"/>
           </a:p>
@@ -10589,9 +10589,9 @@
             <a:prstDash val="solid"/>
           </a:ln>
           <a:effectLst>
-            <a:outerShdw sx="100000" sy="100000" kx="0" ky="0" algn="bl" rotWithShape="0" blurRad="2.7554406678199403e+103" dist="7.872687622342685e+102" dir="2.5587259226936733e+121">
+            <a:outerShdw sx="100000" sy="100000" kx="0" ky="0" algn="bl" rotWithShape="0" blurRad="88900" dist="25400" dir="5400000">
               <a:srgbClr val="9AB4CC">
-                <a:alpha val="2.9999999999999995e+124"/>
+                <a:alpha val="30000"/>
               </a:srgbClr>
             </a:outerShdw>
           </a:effectLst>

--- a/public/downloads/US-114050-L4-Business-Information-Needs.pptx
+++ b/public/downloads/US-114050-L4-Business-Information-Needs.pptx
@@ -2018,7 +2018,7 @@
                 <a:ea typeface="Aptos" pitchFamily="34" charset="-122"/>
                 <a:cs typeface="Aptos" pitchFamily="34" charset="-120"/>
               </a:rPr>
-              <a:t>US 114050 � LESSON 4 � NQF LEVEL 5</a:t>
+              <a:t>US 114050 · LESSON 4 · NQF LEVEL 5</a:t>
             </a:r>
             <a:endParaRPr lang="en-US" sz="1800" dirty="0"/>
           </a:p>
@@ -2099,7 +2099,7 @@
                 <a:ea typeface="Aptos" pitchFamily="34" charset="-122"/>
                 <a:cs typeface="Aptos" pitchFamily="34" charset="-120"/>
               </a:rPr>
-              <a:t>From data to wisdom � how a business gathers data, turns it into information, uses it in its roles, and protects it from threats</a:t>
+              <a:t>From data to wisdom — how a business gathers data, turns it into information, uses it in its roles, and protects it from threats</a:t>
             </a:r>
             <a:endParaRPr lang="en-US" sz="1900" dirty="0"/>
           </a:p>
@@ -2233,7 +2233,7 @@
                 <a:ea typeface="Aptos" pitchFamily="34" charset="-122"/>
                 <a:cs typeface="Aptos" pitchFamily="34" charset="-120"/>
               </a:rPr>
-              <a:t>90 minutes � Self &amp; Group</a:t>
+              <a:t>90 minutes · Self &amp; Group</a:t>
             </a:r>
             <a:endParaRPr lang="en-US" sz="1800" dirty="0"/>
           </a:p>
@@ -2314,7 +2314,7 @@
                 <a:ea typeface="Aptos" pitchFamily="34" charset="-122"/>
                 <a:cs typeface="Aptos" pitchFamily="34" charset="-120"/>
               </a:rPr>
-              <a:t>Thursday, 27 Aug 2026 � 09h00 � 14h00</a:t>
+              <a:t>Thursday, 27 Aug 2026 · 09h00 – 14h00</a:t>
             </a:r>
             <a:endParaRPr lang="en-US" sz="1800" dirty="0"/>
           </a:p>
@@ -2395,7 +2395,7 @@
                 <a:ea typeface="Aptos" pitchFamily="34" charset="-122"/>
                 <a:cs typeface="Aptos" pitchFamily="34" charset="-120"/>
               </a:rPr>
-              <a:t>Module 1 � Professional Team Development</a:t>
+              <a:t>Module 1 · Professional Team Development</a:t>
             </a:r>
             <a:endParaRPr lang="en-US" sz="1800" dirty="0"/>
           </a:p>
@@ -2515,7 +2515,7 @@
                 <a:ea typeface="Aptos" pitchFamily="34" charset="-122"/>
                 <a:cs typeface="Aptos" pitchFamily="34" charset="-120"/>
               </a:rPr>
-              <a:t>ITSS Learn � Investec � Corporate Banking Technology</a:t>
+              <a:t>ITSS Learn · Investec · Corporate Banking Technology</a:t>
             </a:r>
             <a:endParaRPr lang="en-US" sz="1800" dirty="0"/>
           </a:p>
@@ -2586,7 +2586,7 @@
                 <a:ea typeface="Aptos" pitchFamily="34" charset="-122"/>
                 <a:cs typeface="Aptos" pitchFamily="34" charset="-120"/>
               </a:rPr>
-              <a:t>US 114050 · Lesson 4 — The business and its information needs · NQF 5</a:t>
+              <a:t>US 114050 Â· Lesson 4 â€” The business and its information needs Â· NQF 5</a:t>
             </a:r>
             <a:endParaRPr lang="en-US" sz="1800" dirty="0"/>
           </a:p>
@@ -2871,7 +2871,7 @@
                 <a:ea typeface="Aptos" pitchFamily="34" charset="-122"/>
                 <a:cs typeface="Aptos" pitchFamily="34" charset="-120"/>
               </a:rPr>
-              <a:t>Hackers or insiders reading data they have no right to see. Defend: passwords + MFA, per-role access rights, encryption � POPIA makes it a legal duty.</a:t>
+              <a:t>Hackers or insiders reading data they have no right to see. Defend: passwords + MFA, per-role access rights, encryption — POPIA makes it a legal duty.</a:t>
             </a:r>
             <a:endParaRPr lang="en-US" sz="1800" dirty="0"/>
           </a:p>
@@ -3019,7 +3019,7 @@
                 <a:ea typeface="Aptos" pitchFamily="34" charset="-122"/>
                 <a:cs typeface="Aptos" pitchFamily="34" charset="-120"/>
               </a:rPr>
-              <a:t>Software that corrupts, steals or destroys data � in 2026 above all ransomware via phishing email. Defend: antivirus, patches, backups, cautious staff.</a:t>
+              <a:t>Software that corrupts, steals or destroys data — in 2026 above all ransomware via phishing email. Defend: antivirus, patches, backups, cautious staff.</a:t>
             </a:r>
             <a:endParaRPr lang="en-US" sz="1800" dirty="0"/>
           </a:p>
@@ -3238,7 +3238,7 @@
                 <a:ea typeface="Aptos" pitchFamily="34" charset="-122"/>
                 <a:cs typeface="Aptos" pitchFamily="34" charset="-120"/>
               </a:rPr>
-              <a:t>US 114050 · Lesson 4 — The business and its information needs · NQF 5</a:t>
+              <a:t>US 114050 Â· Lesson 4 â€” The business and its information needs Â· NQF 5</a:t>
             </a:r>
             <a:endParaRPr lang="en-US" sz="1800" dirty="0"/>
           </a:p>
@@ -4166,7 +4166,7 @@
                 <a:ea typeface="Aptos" pitchFamily="34" charset="-122"/>
                 <a:cs typeface="Aptos" pitchFamily="34" charset="-120"/>
               </a:rPr>
-              <a:t>US 114050 · Lesson 4 — The business and its information needs · NQF 5</a:t>
+              <a:t>US 114050 Â· Lesson 4 â€” The business and its information needs Â· NQF 5</a:t>
             </a:r>
             <a:endParaRPr lang="en-US" sz="1800" dirty="0"/>
           </a:p>
@@ -4451,7 +4451,7 @@
                 <a:ea typeface="Aptos" pitchFamily="34" charset="-122"/>
                 <a:cs typeface="Aptos" pitchFamily="34" charset="-120"/>
               </a:rPr>
-              <a:t>90 minutes � Self &amp; Group � all 14 questions: data, information, the five roles, the three threats and the four sub-systems. AI-marked.</a:t>
+              <a:t>90 minutes · Self &amp; Group — all 14 questions: data, information, the five roles, the three threats and the four sub-systems. AI-marked.</a:t>
             </a:r>
             <a:endParaRPr lang="en-US" sz="1800" dirty="0"/>
           </a:p>
@@ -4599,7 +4599,7 @@
                 <a:ea typeface="Aptos" pitchFamily="34" charset="-122"/>
                 <a:cs typeface="Aptos" pitchFamily="34" charset="-120"/>
               </a:rPr>
-              <a:t>Every section gates on its five questions � all correct unlocks Next.</a:t>
+              <a:t>Every section gates on its five questions — all correct unlocks Next.</a:t>
             </a:r>
             <a:endParaRPr lang="en-US" sz="1800" dirty="0"/>
           </a:p>
@@ -4747,7 +4747,7 @@
                 <a:ea typeface="Aptos" pitchFamily="34" charset="-122"/>
                 <a:cs typeface="Aptos" pitchFamily="34" charset="-120"/>
               </a:rPr>
-              <a:t>“I am able to explain the relationship between a business and its data requirements” � tick it honestly, or write it down as a goal.</a:t>
+              <a:t>“I am able to explain the relationship between a business and its data requirements” — tick it honestly, or write it down as a goal.</a:t>
             </a:r>
             <a:endParaRPr lang="en-US" sz="1800" dirty="0"/>
           </a:p>
@@ -4853,7 +4853,7 @@
                 <a:ea typeface="Aptos Display" pitchFamily="34" charset="-122"/>
                 <a:cs typeface="Aptos Display" pitchFamily="34" charset="-120"/>
               </a:rPr>
-              <a:t>Logbook project � Research</a:t>
+              <a:t>Logbook project — Research</a:t>
             </a:r>
             <a:endParaRPr lang="en-US" sz="2000" dirty="0"/>
           </a:p>
@@ -4966,7 +4966,7 @@
                 <a:ea typeface="Aptos" pitchFamily="34" charset="-122"/>
                 <a:cs typeface="Aptos" pitchFamily="34" charset="-120"/>
               </a:rPr>
-              <a:t>US 114050 · Lesson 4 — The business and its information needs · NQF 5</a:t>
+              <a:t>US 114050 Â· Lesson 4 â€” The business and its information needs Â· NQF 5</a:t>
             </a:r>
             <a:endParaRPr lang="en-US" sz="1800" dirty="0"/>
           </a:p>
@@ -5156,7 +5156,7 @@
                 <a:ea typeface="Aptos" pitchFamily="34" charset="-122"/>
                 <a:cs typeface="Aptos" pitchFamily="34" charset="-120"/>
               </a:rPr>
-              <a:t>Data → information → knowledge → understanding → wisdom � decisions, price control, quality (PDCA), marketing and BPM � guard it against unauthorised access, malware and insiders � give HR, Production, Marketing and Finance the information they need.</a:t>
+              <a:t>Data → information → knowledge → understanding → wisdom · decisions, price control, quality (PDCA), marketing and BPM · guard it against unauthorised access, malware and insiders · give HR, Production, Marketing and Finance the information they need.</a:t>
             </a:r>
             <a:endParaRPr lang="en-US" sz="1800" dirty="0"/>
           </a:p>
@@ -5195,7 +5195,7 @@
                 <a:ea typeface="Aptos" pitchFamily="34" charset="-122"/>
                 <a:cs typeface="Aptos" pitchFamily="34" charset="-120"/>
               </a:rPr>
-              <a:t>US 114050 � National Certificate: IT � System Support � SAQA ID 48573 � ITSS Learn</a:t>
+              <a:t>US 114050 · National Certificate: IT — System Support · SAQA ID 48573 · ITSS Learn</a:t>
             </a:r>
             <a:endParaRPr lang="en-US" sz="1800" dirty="0"/>
           </a:p>
@@ -5266,7 +5266,7 @@
                 <a:ea typeface="Aptos" pitchFamily="34" charset="-122"/>
                 <a:cs typeface="Aptos" pitchFamily="34" charset="-120"/>
               </a:rPr>
-              <a:t>US 114050 · Lesson 4 — The business and its information needs · NQF 5</a:t>
+              <a:t>US 114050 Â· Lesson 4 â€” The business and its information needs Â· NQF 5</a:t>
             </a:r>
             <a:endParaRPr lang="en-US" sz="1800" dirty="0"/>
           </a:p>
@@ -5593,7 +5593,7 @@
                 <a:ea typeface="Aptos" pitchFamily="34" charset="-122"/>
                 <a:cs typeface="Aptos" pitchFamily="34" charset="-120"/>
               </a:rPr>
-              <a:t>Symbols � raw facts with no significance beyond their existence.</a:t>
+              <a:t>Symbols — raw facts with no significance beyond their existence.</a:t>
             </a:r>
             <a:endParaRPr lang="en-US" sz="1800" dirty="0"/>
           </a:p>
@@ -5741,7 +5741,7 @@
                 <a:ea typeface="Aptos" pitchFamily="34" charset="-122"/>
                 <a:cs typeface="Aptos" pitchFamily="34" charset="-120"/>
               </a:rPr>
-              <a:t>Data processed to be useful � answers who, what, where, when.</a:t>
+              <a:t>Data processed to be useful — answers who, what, where, when.</a:t>
             </a:r>
             <a:endParaRPr lang="en-US" sz="1800" dirty="0"/>
           </a:p>
@@ -5889,7 +5889,7 @@
                 <a:ea typeface="Aptos" pitchFamily="34" charset="-122"/>
                 <a:cs typeface="Aptos" pitchFamily="34" charset="-120"/>
               </a:rPr>
-              <a:t>Application of data and information � answers how.</a:t>
+              <a:t>Application of data and information — answers how.</a:t>
             </a:r>
             <a:endParaRPr lang="en-US" sz="1800" dirty="0"/>
           </a:p>
@@ -6037,7 +6037,7 @@
                 <a:ea typeface="Aptos" pitchFamily="34" charset="-122"/>
                 <a:cs typeface="Aptos" pitchFamily="34" charset="-120"/>
               </a:rPr>
-              <a:t>Appreciation of why � carries each level to the next.</a:t>
+              <a:t>Appreciation of why — carries each level to the next.</a:t>
             </a:r>
             <a:endParaRPr lang="en-US" sz="1800" dirty="0"/>
           </a:p>
@@ -6185,7 +6185,7 @@
                 <a:ea typeface="Aptos" pitchFamily="34" charset="-122"/>
                 <a:cs typeface="Aptos" pitchFamily="34" charset="-120"/>
               </a:rPr>
-              <a:t>Evaluated understanding � vision and design.</a:t>
+              <a:t>Evaluated understanding — vision and design.</a:t>
             </a:r>
             <a:endParaRPr lang="en-US" sz="1800" dirty="0"/>
           </a:p>
@@ -6300,7 +6300,7 @@
                 <a:ea typeface="Aptos" pitchFamily="34" charset="-122"/>
                 <a:cs typeface="Aptos" pitchFamily="34" charset="-120"/>
               </a:rPr>
-              <a:t>The first four categories deal with the past � what has been or what is known. Only wisdom deals with the future; people must move successively through the other categories to reach it.</a:t>
+              <a:t>The first four categories deal with the past — what has been or what is known. Only wisdom deals with the future; people must move successively through the other categories to reach it.</a:t>
             </a:r>
             <a:endParaRPr lang="en-US" sz="1800" dirty="0"/>
           </a:p>
@@ -6371,7 +6371,7 @@
                 <a:ea typeface="Aptos" pitchFamily="34" charset="-122"/>
                 <a:cs typeface="Aptos" pitchFamily="34" charset="-120"/>
               </a:rPr>
-              <a:t>US 114050 · Lesson 4 — The business and its information needs · NQF 5</a:t>
+              <a:t>US 114050 Â· Lesson 4 â€” The business and its information needs Â· NQF 5</a:t>
             </a:r>
             <a:endParaRPr lang="en-US" sz="1800" dirty="0"/>
           </a:p>
@@ -6656,7 +6656,7 @@
                 <a:ea typeface="Aptos" pitchFamily="34" charset="-122"/>
                 <a:cs typeface="Aptos" pitchFamily="34" charset="-120"/>
               </a:rPr>
-              <a:t>It simply exists � usable or not � and has no meaning of itself. In computer terms, a spreadsheet generally starts out by holding data.</a:t>
+              <a:t>It simply exists — usable or not — and has no meaning of itself. In computer terms, a spreadsheet generally starts out by holding data.</a:t>
             </a:r>
             <a:endParaRPr lang="en-US" sz="1800" dirty="0"/>
           </a:p>
@@ -6919,7 +6919,7 @@
                 <a:ea typeface="Aptos" pitchFamily="34" charset="-122"/>
                 <a:cs typeface="Aptos" pitchFamily="34" charset="-120"/>
               </a:rPr>
-              <a:t>Data: “It is raining.”  �  Information: “The temperature dropped 15 degrees and then it started raining” � a relationship, possibly cause and effect.</a:t>
+              <a:t>Data: “It is raining.”  ·  Information: “The temperature dropped 15 degrees and then it started raining” — a relationship, possibly cause and effect.</a:t>
             </a:r>
             <a:endParaRPr lang="en-US" sz="1800" dirty="0"/>
           </a:p>
@@ -6990,7 +6990,7 @@
                 <a:ea typeface="Aptos" pitchFamily="34" charset="-122"/>
                 <a:cs typeface="Aptos" pitchFamily="34" charset="-120"/>
               </a:rPr>
-              <a:t>US 114050 · Lesson 4 — The business and its information needs · NQF 5</a:t>
+              <a:t>US 114050 Â· Lesson 4 â€” The business and its information needs Â· NQF 5</a:t>
             </a:r>
             <a:endParaRPr lang="en-US" sz="1800" dirty="0"/>
           </a:p>
@@ -7275,7 +7275,7 @@
                 <a:ea typeface="Aptos" pitchFamily="34" charset="-122"/>
                 <a:cs typeface="Aptos" pitchFamily="34" charset="-120"/>
               </a:rPr>
-              <a:t>The appropriate collection of information � memorised, deterministic. The times table answers 2 × 2, but not 1267 × 300.</a:t>
+              <a:t>The appropriate collection of information — memorised, deterministic. The times table answers 2 × 2, but not 1267 × 300.</a:t>
             </a:r>
             <a:endParaRPr lang="en-US" sz="1800" dirty="0"/>
           </a:p>
@@ -7423,7 +7423,7 @@
                 <a:ea typeface="Aptos" pitchFamily="34" charset="-122"/>
                 <a:cs typeface="Aptos" pitchFamily="34" charset="-120"/>
               </a:rPr>
-              <a:t>Cognitive and analytical � synthesises NEW knowledge from what is known. Learning, not memorising. AI systems (2026: Copilot, Gemini) do this at scale.</a:t>
+              <a:t>Cognitive and analytical — synthesises NEW knowledge from what is known. Learning, not memorising. AI systems (2026: Copilot, Gemini) do this at scale.</a:t>
             </a:r>
             <a:endParaRPr lang="en-US" sz="1800" dirty="0"/>
           </a:p>
@@ -7686,7 +7686,7 @@
                 <a:ea typeface="Aptos" pitchFamily="34" charset="-122"/>
                 <a:cs typeface="Aptos" pitchFamily="34" charset="-120"/>
               </a:rPr>
-              <a:t>Knowledge: high humidity + a sharp temperature drop usually means rain. Wisdom is systemic: “it rains because it rains” � grasping all the interactions between evaporation, air currents and temperature gradients.</a:t>
+              <a:t>Knowledge: high humidity + a sharp temperature drop usually means rain. Wisdom is systemic: “it rains because it rains” — grasping all the interactions between evaporation, air currents and temperature gradients.</a:t>
             </a:r>
             <a:endParaRPr lang="en-US" sz="1800" dirty="0"/>
           </a:p>
@@ -7757,7 +7757,7 @@
                 <a:ea typeface="Aptos" pitchFamily="34" charset="-122"/>
                 <a:cs typeface="Aptos" pitchFamily="34" charset="-120"/>
               </a:rPr>
-              <a:t>US 114050 · Lesson 4 — The business and its information needs · NQF 5</a:t>
+              <a:t>US 114050 Â· Lesson 4 â€” The business and its information needs Â· NQF 5</a:t>
             </a:r>
             <a:endParaRPr lang="en-US" sz="1800" dirty="0"/>
           </a:p>
@@ -7894,7 +7894,7 @@
                 <a:ea typeface="Aptos Display" pitchFamily="34" charset="-122"/>
                 <a:cs typeface="Aptos Display" pitchFamily="34" charset="-120"/>
               </a:rPr>
-              <a:t>When is a pattern knowledge � and when is it noise?</a:t>
+              <a:t>When is a pattern knowledge — and when is it noise?</a:t>
             </a:r>
             <a:endParaRPr lang="en-US" sz="3000" dirty="0"/>
           </a:p>
@@ -7940,7 +7940,7 @@
                 <a:ea typeface="Aptos" pitchFamily="34" charset="-122"/>
                 <a:cs typeface="Aptos" pitchFamily="34" charset="-120"/>
               </a:rPr>
-              <a:t>“Abugt dbesbt regtc uatn s uitrzt…” � 100% novelty. To you it is noise; there is no foundation to connect with the pattern. Yet translated, these are Newton's three laws of motion.</a:t>
+              <a:t>“Abugt dbesbt regtc uatn s uitrzt…” — 100% novelty. To you it is noise; there is no foundation to connect with the pattern. Yet translated, these are Newton's three laws of motion.</a:t>
             </a:r>
             <a:endParaRPr lang="en-US" sz="1800" dirty="0"/>
           </a:p>
@@ -8012,7 +8012,7 @@
                 <a:ea typeface="Aptos" pitchFamily="34" charset="-122"/>
                 <a:cs typeface="Aptos" pitchFamily="34" charset="-120"/>
               </a:rPr>
-              <a:t>A refrigerator � at some point you connected with the pattern, and every further statement only confirmed it. In a society without refrigerators, it stays a riddle.</a:t>
+              <a:t>A refrigerator — at some point you connected with the pattern, and every further statement only confirmed it. In a society without refrigerators, it stays a riddle.</a:t>
             </a:r>
             <a:endParaRPr lang="en-US" sz="1800" dirty="0"/>
           </a:p>
@@ -8127,7 +8127,7 @@
                 <a:ea typeface="Aptos" pitchFamily="34" charset="-122"/>
                 <a:cs typeface="Aptos" pitchFamily="34" charset="-120"/>
               </a:rPr>
-              <a:t>Information only becomes knowledge when the receiver can connect it to a pattern they understand � present information in the language and context of its users, or it is noise.</a:t>
+              <a:t>Information only becomes knowledge when the receiver can connect it to a pattern they understand — present information in the language and context of its users, or it is noise.</a:t>
             </a:r>
             <a:endParaRPr lang="en-US" sz="1800" dirty="0"/>
           </a:p>
@@ -8198,7 +8198,7 @@
                 <a:ea typeface="Aptos" pitchFamily="34" charset="-122"/>
                 <a:cs typeface="Aptos" pitchFamily="34" charset="-120"/>
               </a:rPr>
-              <a:t>US 114050 · Lesson 4 — The business and its information needs · NQF 5</a:t>
+              <a:t>US 114050 Â· Lesson 4 â€” The business and its information needs Â· NQF 5</a:t>
             </a:r>
             <a:endParaRPr lang="en-US" sz="1800" dirty="0"/>
           </a:p>
@@ -8381,7 +8381,7 @@
                 <a:ea typeface="Aptos" pitchFamily="34" charset="-122"/>
                 <a:cs typeface="Aptos" pitchFamily="34" charset="-120"/>
               </a:rPr>
-              <a:t>Decision making is the cognitive process leading to the selection of a course of action among variations � every process produces a final choice: an action or an opinion.</a:t>
+              <a:t>Decision making is the cognitive process leading to the selection of a course of action among variations — every process produces a final choice: an action or an opinion.</a:t>
             </a:r>
             <a:endParaRPr lang="en-US" sz="1800" dirty="0"/>
           </a:p>
@@ -8405,7 +8405,7 @@
                 <a:ea typeface="Aptos" pitchFamily="34" charset="-122"/>
                 <a:cs typeface="Aptos" pitchFamily="34" charset="-120"/>
               </a:rPr>
-              <a:t>It begins when we need to do something but know not what � a reasoning process, rational or irrational, on explicit or tacit assumptions.</a:t>
+              <a:t>It begins when we need to do something but know not what — a reasoning process, rational or irrational, on explicit or tacit assumptions.</a:t>
             </a:r>
             <a:endParaRPr lang="en-US" sz="1800" dirty="0"/>
           </a:p>
@@ -8429,7 +8429,7 @@
                 <a:ea typeface="Aptos" pitchFamily="34" charset="-122"/>
                 <a:cs typeface="Aptos" pitchFamily="34" charset="-120"/>
               </a:rPr>
-              <a:t>Structured, rational decisions drive science-based professions � e.g. medical diagnosis, then treatment selection.</a:t>
+              <a:t>Structured, rational decisions drive science-based professions — e.g. medical diagnosis, then treatment selection.</a:t>
             </a:r>
             <a:endParaRPr lang="en-US" sz="1800" dirty="0"/>
           </a:p>
@@ -8548,7 +8548,7 @@
                 <a:ea typeface="Aptos" pitchFamily="34" charset="-122"/>
                 <a:cs typeface="Aptos" pitchFamily="34" charset="-120"/>
               </a:rPr>
-              <a:t>US 114050 · Lesson 4 — The business and its information needs · NQF 5</a:t>
+              <a:t>US 114050 Â· Lesson 4 â€” The business and its information needs Â· NQF 5</a:t>
             </a:r>
             <a:endParaRPr lang="en-US" sz="1800" dirty="0"/>
           </a:p>
@@ -8833,7 +8833,7 @@
                 <a:ea typeface="Aptos" pitchFamily="34" charset="-122"/>
                 <a:cs typeface="Aptos" pitchFamily="34" charset="-120"/>
               </a:rPr>
-              <a:t>Prices set by supply and demand � signals between producers and consumers that ration supplies, distribute income and allocate resources.</a:t>
+              <a:t>Prices set by supply and demand — signals between producers and consumers that ration supplies, distribute income and allocate resources.</a:t>
             </a:r>
             <a:endParaRPr lang="en-US" sz="1800" dirty="0"/>
           </a:p>
@@ -9167,7 +9167,7 @@
                 <a:ea typeface="Aptos" pitchFamily="34" charset="-122"/>
                 <a:cs typeface="Aptos" pitchFamily="34" charset="-120"/>
               </a:rPr>
-              <a:t>US 114050 · Lesson 4 — The business and its information needs · NQF 5</a:t>
+              <a:t>US 114050 Â· Lesson 4 â€” The business and its information needs Â· NQF 5</a:t>
             </a:r>
             <a:endParaRPr lang="en-US" sz="1800" dirty="0"/>
           </a:p>
@@ -9346,7 +9346,7 @@
                 <a:ea typeface="Aptos" pitchFamily="34" charset="-122"/>
                 <a:cs typeface="Aptos" pitchFamily="34" charset="-120"/>
               </a:rPr>
-              <a:t>Quality systems ensure products and services meet or exceed customer requirements � “fit for purpose”, “do it right the first time”. QA covers design through documentation.</a:t>
+              <a:t>Quality systems ensure products and services meet or exceed customer requirements — “fit for purpose”, “do it right the first time”. QA covers design through documentation.</a:t>
             </a:r>
             <a:endParaRPr lang="en-US" sz="1800" dirty="0"/>
           </a:p>
@@ -10053,7 +10053,7 @@
                 <a:ea typeface="Aptos" pitchFamily="34" charset="-122"/>
                 <a:cs typeface="Aptos" pitchFamily="34" charset="-120"/>
               </a:rPr>
-              <a:t>Competitors' items are checked and measured against the organisation's own quality � that comparison depends on communication.</a:t>
+              <a:t>Competitors' items are checked and measured against the organisation's own quality — that comparison depends on communication.</a:t>
             </a:r>
             <a:endParaRPr lang="en-US" sz="1800" dirty="0"/>
           </a:p>
@@ -10124,7 +10124,7 @@
                 <a:ea typeface="Aptos" pitchFamily="34" charset="-122"/>
                 <a:cs typeface="Aptos" pitchFamily="34" charset="-120"/>
               </a:rPr>
-              <a:t>US 114050 · Lesson 4 — The business and its information needs · NQF 5</a:t>
+              <a:t>US 114050 Â· Lesson 4 â€” The business and its information needs Â· NQF 5</a:t>
             </a:r>
             <a:endParaRPr lang="en-US" sz="1800" dirty="0"/>
           </a:p>
@@ -10557,7 +10557,7 @@
                 <a:ea typeface="Aptos" pitchFamily="34" charset="-122"/>
                 <a:cs typeface="Aptos" pitchFamily="34" charset="-120"/>
               </a:rPr>
-              <a:t>Processes that organise, automate and analyse the metrics, processes and systems driving performance � the next generation of business intelligence (BI).</a:t>
+              <a:t>Processes that organise, automate and analyse the metrics, processes and systems driving performance — the next generation of business intelligence (BI).</a:t>
             </a:r>
             <a:endParaRPr lang="en-US" sz="1800" dirty="0"/>
           </a:p>

--- a/public/downloads/US-114050-L4-Business-Information-Needs.pptx
+++ b/public/downloads/US-114050-L4-Business-Information-Needs.pptx
@@ -2586,7 +2586,7 @@
                 <a:ea typeface="Aptos" pitchFamily="34" charset="-122"/>
                 <a:cs typeface="Aptos" pitchFamily="34" charset="-120"/>
               </a:rPr>
-              <a:t>US 114050 Â· Lesson 4 â€” The business and its information needs Â· NQF 5</a:t>
+              <a:t>US 114050 · Lesson 4 — The business and its information needs · NQF 5</a:t>
             </a:r>
             <a:endParaRPr lang="en-US" sz="1800" dirty="0"/>
           </a:p>
@@ -3238,7 +3238,7 @@
                 <a:ea typeface="Aptos" pitchFamily="34" charset="-122"/>
                 <a:cs typeface="Aptos" pitchFamily="34" charset="-120"/>
               </a:rPr>
-              <a:t>US 114050 Â· Lesson 4 â€” The business and its information needs Â· NQF 5</a:t>
+              <a:t>US 114050 · Lesson 4 — The business and its information needs · NQF 5</a:t>
             </a:r>
             <a:endParaRPr lang="en-US" sz="1800" dirty="0"/>
           </a:p>
@@ -4166,7 +4166,7 @@
                 <a:ea typeface="Aptos" pitchFamily="34" charset="-122"/>
                 <a:cs typeface="Aptos" pitchFamily="34" charset="-120"/>
               </a:rPr>
-              <a:t>US 114050 Â· Lesson 4 â€” The business and its information needs Â· NQF 5</a:t>
+              <a:t>US 114050 · Lesson 4 — The business and its information needs · NQF 5</a:t>
             </a:r>
             <a:endParaRPr lang="en-US" sz="1800" dirty="0"/>
           </a:p>
@@ -4966,7 +4966,7 @@
                 <a:ea typeface="Aptos" pitchFamily="34" charset="-122"/>
                 <a:cs typeface="Aptos" pitchFamily="34" charset="-120"/>
               </a:rPr>
-              <a:t>US 114050 Â· Lesson 4 â€” The business and its information needs Â· NQF 5</a:t>
+              <a:t>US 114050 · Lesson 4 — The business and its information needs · NQF 5</a:t>
             </a:r>
             <a:endParaRPr lang="en-US" sz="1800" dirty="0"/>
           </a:p>
@@ -5266,7 +5266,7 @@
                 <a:ea typeface="Aptos" pitchFamily="34" charset="-122"/>
                 <a:cs typeface="Aptos" pitchFamily="34" charset="-120"/>
               </a:rPr>
-              <a:t>US 114050 Â· Lesson 4 â€” The business and its information needs Â· NQF 5</a:t>
+              <a:t>US 114050 · Lesson 4 — The business and its information needs · NQF 5</a:t>
             </a:r>
             <a:endParaRPr lang="en-US" sz="1800" dirty="0"/>
           </a:p>
@@ -6371,7 +6371,7 @@
                 <a:ea typeface="Aptos" pitchFamily="34" charset="-122"/>
                 <a:cs typeface="Aptos" pitchFamily="34" charset="-120"/>
               </a:rPr>
-              <a:t>US 114050 Â· Lesson 4 â€” The business and its information needs Â· NQF 5</a:t>
+              <a:t>US 114050 · Lesson 4 — The business and its information needs · NQF 5</a:t>
             </a:r>
             <a:endParaRPr lang="en-US" sz="1800" dirty="0"/>
           </a:p>
@@ -6990,7 +6990,7 @@
                 <a:ea typeface="Aptos" pitchFamily="34" charset="-122"/>
                 <a:cs typeface="Aptos" pitchFamily="34" charset="-120"/>
               </a:rPr>
-              <a:t>US 114050 Â· Lesson 4 â€” The business and its information needs Â· NQF 5</a:t>
+              <a:t>US 114050 · Lesson 4 — The business and its information needs · NQF 5</a:t>
             </a:r>
             <a:endParaRPr lang="en-US" sz="1800" dirty="0"/>
           </a:p>
@@ -7757,7 +7757,7 @@
                 <a:ea typeface="Aptos" pitchFamily="34" charset="-122"/>
                 <a:cs typeface="Aptos" pitchFamily="34" charset="-120"/>
               </a:rPr>
-              <a:t>US 114050 Â· Lesson 4 â€” The business and its information needs Â· NQF 5</a:t>
+              <a:t>US 114050 · Lesson 4 — The business and its information needs · NQF 5</a:t>
             </a:r>
             <a:endParaRPr lang="en-US" sz="1800" dirty="0"/>
           </a:p>
@@ -8198,7 +8198,7 @@
                 <a:ea typeface="Aptos" pitchFamily="34" charset="-122"/>
                 <a:cs typeface="Aptos" pitchFamily="34" charset="-120"/>
               </a:rPr>
-              <a:t>US 114050 Â· Lesson 4 â€” The business and its information needs Â· NQF 5</a:t>
+              <a:t>US 114050 · Lesson 4 — The business and its information needs · NQF 5</a:t>
             </a:r>
             <a:endParaRPr lang="en-US" sz="1800" dirty="0"/>
           </a:p>
@@ -8548,7 +8548,7 @@
                 <a:ea typeface="Aptos" pitchFamily="34" charset="-122"/>
                 <a:cs typeface="Aptos" pitchFamily="34" charset="-120"/>
               </a:rPr>
-              <a:t>US 114050 Â· Lesson 4 â€” The business and its information needs Â· NQF 5</a:t>
+              <a:t>US 114050 · Lesson 4 — The business and its information needs · NQF 5</a:t>
             </a:r>
             <a:endParaRPr lang="en-US" sz="1800" dirty="0"/>
           </a:p>
@@ -9167,7 +9167,7 @@
                 <a:ea typeface="Aptos" pitchFamily="34" charset="-122"/>
                 <a:cs typeface="Aptos" pitchFamily="34" charset="-120"/>
               </a:rPr>
-              <a:t>US 114050 Â· Lesson 4 â€” The business and its information needs Â· NQF 5</a:t>
+              <a:t>US 114050 · Lesson 4 — The business and its information needs · NQF 5</a:t>
             </a:r>
             <a:endParaRPr lang="en-US" sz="1800" dirty="0"/>
           </a:p>
@@ -10124,7 +10124,7 @@
                 <a:ea typeface="Aptos" pitchFamily="34" charset="-122"/>
                 <a:cs typeface="Aptos" pitchFamily="34" charset="-120"/>
               </a:rPr>
-              <a:t>US 114050 Â· Lesson 4 â€” The business and its information needs Â· NQF 5</a:t>
+              <a:t>US 114050 · Lesson 4 — The business and its information needs · NQF 5</a:t>
             </a:r>
             <a:endParaRPr lang="en-US" sz="1800" dirty="0"/>
           </a:p>
